--- a/Software Básico/Aula 02 - Algoritmos/Aula 02 - Variaveis.pptx
+++ b/Software Básico/Aula 02 - Algoritmos/Aula 02 - Variaveis.pptx
@@ -29,19 +29,31 @@
   <p:notesSz cx="6858000" cy="12192000"/>
   <p:embeddedFontLst>
     <p:embeddedFont>
-      <p:font typeface="Consolas" panose="020B0609020204030204" pitchFamily="49" charset="0"/>
+      <p:font typeface="Calibri" panose="020F0502020204030204" pitchFamily="34" charset="0"/>
       <p:regular r:id="rId19"/>
       <p:bold r:id="rId20"/>
       <p:italic r:id="rId21"/>
       <p:boldItalic r:id="rId22"/>
     </p:embeddedFont>
     <p:embeddedFont>
+      <p:font typeface="Consolas" panose="020B0609020204030204" pitchFamily="49" charset="0"/>
+      <p:regular r:id="rId23"/>
+      <p:bold r:id="rId24"/>
+      <p:italic r:id="rId25"/>
+      <p:boldItalic r:id="rId26"/>
+    </p:embeddedFont>
+    <p:embeddedFont>
       <p:font typeface="Inter" panose="020B0604020202020204" charset="0"/>
-      <p:regular r:id="rId23"/>
+      <p:regular r:id="rId27"/>
     </p:embeddedFont>
     <p:embeddedFont>
       <p:font typeface="Inter Bold" panose="020B0604020202020204" charset="0"/>
-      <p:regular r:id="rId24"/>
+      <p:regular r:id="rId28"/>
+    </p:embeddedFont>
+    <p:embeddedFont>
+      <p:font typeface="Tahoma" panose="020B0604030504040204" pitchFamily="34" charset="0"/>
+      <p:regular r:id="rId29"/>
+      <p:bold r:id="rId30"/>
     </p:embeddedFont>
   </p:embeddedFontLst>
   <p:defaultTextStyle>
@@ -10604,24 +10616,36 @@
           <a:bodyPr wrap="none" lIns="0" tIns="0" rIns="0" bIns="0" rtlCol="0" anchor="t"/>
           <a:lstStyle/>
           <a:p>
-            <a:pPr marL="0" indent="0" algn="l">
+            <a:pPr>
               <a:lnSpc>
                 <a:spcPct val="104000"/>
               </a:lnSpc>
-              <a:buNone/>
             </a:pPr>
             <a:r>
-              <a:rPr lang="en-US" sz="3300" b="1" kern="0" spc="-99" dirty="0">
-                <a:solidFill>
-                  <a:srgbClr val="000000"/>
-                </a:solidFill>
+              <a:rPr lang="en-US" sz="2350" b="1" spc="-72" dirty="0" err="1">
                 <a:latin typeface="Inter Bold" pitchFamily="34" charset="0"/>
                 <a:ea typeface="Inter Bold" pitchFamily="34" charset="-122"/>
-                <a:cs typeface="Inter Bold" pitchFamily="34" charset="-120"/>
-              </a:rPr>
-              <a:t>Operadores Aritméticos</a:t>
-            </a:r>
-            <a:endParaRPr lang="en-US" sz="3300" dirty="0"/>
+              </a:rPr>
+              <a:t>Operadores</a:t>
+            </a:r>
+            <a:r>
+              <a:rPr lang="en-US" sz="2350" b="1" spc="-72" dirty="0">
+                <a:latin typeface="Inter Bold" pitchFamily="34" charset="0"/>
+                <a:ea typeface="Inter Bold" pitchFamily="34" charset="-122"/>
+              </a:rPr>
+              <a:t> </a:t>
+            </a:r>
+            <a:r>
+              <a:rPr lang="en-US" sz="2350" b="1" spc="-72" dirty="0" err="1">
+                <a:latin typeface="Inter Bold" pitchFamily="34" charset="0"/>
+                <a:ea typeface="Inter Bold" pitchFamily="34" charset="-122"/>
+              </a:rPr>
+              <a:t>Aritméticos</a:t>
+            </a:r>
+            <a:endParaRPr lang="en-US" sz="2350" b="1" spc="-72" dirty="0">
+              <a:latin typeface="Inter Bold" pitchFamily="34" charset="0"/>
+              <a:ea typeface="Inter Bold" pitchFamily="34" charset="-122"/>
+            </a:endParaRPr>
           </a:p>
         </p:txBody>
       </p:sp>
@@ -14899,11 +14923,28 @@
         </p:nvSpPr>
         <p:spPr/>
         <p:txBody>
-          <a:bodyPr/>
+          <a:bodyPr>
+            <a:normAutofit/>
+          </a:bodyPr>
           <a:lstStyle/>
           <a:p>
-            <a:r>
-              <a:rPr lang="pt-BR" dirty="0"/>
+            <a:pPr>
+              <a:lnSpc>
+                <a:spcPct val="104000"/>
+              </a:lnSpc>
+              <a:spcBef>
+                <a:spcPts val="0"/>
+              </a:spcBef>
+            </a:pPr>
+            <a:r>
+              <a:rPr lang="pt-BR" sz="3600" b="1" spc="-72" dirty="0">
+                <a:solidFill>
+                  <a:srgbClr val="000000"/>
+                </a:solidFill>
+                <a:latin typeface="Inter Bold" pitchFamily="34" charset="0"/>
+                <a:ea typeface="Inter Bold" pitchFamily="34" charset="-122"/>
+                <a:cs typeface="Arial"/>
+              </a:rPr>
               <a:t>Desafios</a:t>
             </a:r>
           </a:p>
@@ -15338,11 +15379,28 @@
         </p:nvSpPr>
         <p:spPr/>
         <p:txBody>
-          <a:bodyPr/>
+          <a:bodyPr>
+            <a:normAutofit/>
+          </a:bodyPr>
           <a:lstStyle/>
           <a:p>
-            <a:r>
-              <a:rPr lang="pt-BR" dirty="0"/>
+            <a:pPr>
+              <a:lnSpc>
+                <a:spcPct val="104000"/>
+              </a:lnSpc>
+              <a:spcBef>
+                <a:spcPts val="0"/>
+              </a:spcBef>
+            </a:pPr>
+            <a:r>
+              <a:rPr lang="pt-BR" sz="3600" b="1" spc="-72" dirty="0">
+                <a:solidFill>
+                  <a:srgbClr val="000000"/>
+                </a:solidFill>
+                <a:latin typeface="Inter Bold" pitchFamily="34" charset="0"/>
+                <a:ea typeface="Inter Bold" pitchFamily="34" charset="-122"/>
+                <a:cs typeface="Arial"/>
+              </a:rPr>
               <a:t>Desafios</a:t>
             </a:r>
           </a:p>
@@ -15722,11 +15780,28 @@
         </p:nvSpPr>
         <p:spPr/>
         <p:txBody>
-          <a:bodyPr/>
+          <a:bodyPr>
+            <a:normAutofit/>
+          </a:bodyPr>
           <a:lstStyle/>
           <a:p>
-            <a:r>
-              <a:rPr lang="pt-BR" dirty="0"/>
+            <a:pPr>
+              <a:lnSpc>
+                <a:spcPct val="104000"/>
+              </a:lnSpc>
+              <a:spcBef>
+                <a:spcPts val="0"/>
+              </a:spcBef>
+            </a:pPr>
+            <a:r>
+              <a:rPr lang="pt-BR" sz="3600" b="1" spc="-72" dirty="0">
+                <a:solidFill>
+                  <a:srgbClr val="000000"/>
+                </a:solidFill>
+                <a:latin typeface="Inter Bold" pitchFamily="34" charset="0"/>
+                <a:ea typeface="Inter Bold" pitchFamily="34" charset="-122"/>
+                <a:cs typeface="Arial"/>
+              </a:rPr>
               <a:t>Desafios</a:t>
             </a:r>
           </a:p>
@@ -20234,11 +20309,27 @@
         </p:nvSpPr>
         <p:spPr/>
         <p:txBody>
-          <a:bodyPr/>
+          <a:bodyPr>
+            <a:normAutofit/>
+          </a:bodyPr>
           <a:lstStyle/>
           <a:p>
-            <a:r>
-              <a:rPr lang="pt-BR" dirty="0"/>
+            <a:pPr>
+              <a:lnSpc>
+                <a:spcPct val="104000"/>
+              </a:lnSpc>
+              <a:spcBef>
+                <a:spcPts val="0"/>
+              </a:spcBef>
+            </a:pPr>
+            <a:r>
+              <a:rPr lang="pt-BR" sz="2350" b="1" kern="0" spc="-72" dirty="0">
+                <a:solidFill>
+                  <a:srgbClr val="000000"/>
+                </a:solidFill>
+                <a:latin typeface="Inter Bold" pitchFamily="34" charset="0"/>
+                <a:ea typeface="Inter Bold" pitchFamily="34" charset="-122"/>
+              </a:rPr>
               <a:t>Variáveis</a:t>
             </a:r>
           </a:p>
@@ -20273,10 +20364,21 @@
           <a:lstStyle/>
           <a:p>
             <a:pPr marL="0" indent="0">
-              <a:buNone/>
+              <a:lnSpc>
+                <a:spcPct val="133000"/>
+              </a:lnSpc>
+              <a:spcBef>
+                <a:spcPts val="0"/>
+              </a:spcBef>
             </a:pPr>
             <a:r>
-              <a:rPr lang="pt-BR" sz="2400" dirty="0"/>
+              <a:rPr lang="pt-BR" sz="2000" kern="0" spc="-30" dirty="0">
+                <a:solidFill>
+                  <a:srgbClr val="272525"/>
+                </a:solidFill>
+                <a:latin typeface="Inter" pitchFamily="34" charset="0"/>
+                <a:ea typeface="Inter" pitchFamily="34" charset="-122"/>
+              </a:rPr>
               <a:t>Variáveis são espaços na memória RAM do computador usados para armazenar valores que podem mudar durante a execução de um programa. </a:t>
             </a:r>
           </a:p>
@@ -21208,12 +21310,26 @@
         </p:spPr>
         <p:txBody>
           <a:bodyPr>
-            <a:normAutofit fontScale="90000"/>
+            <a:normAutofit/>
           </a:bodyPr>
           <a:lstStyle/>
           <a:p>
-            <a:r>
-              <a:rPr lang="pt-BR" dirty="0"/>
+            <a:pPr>
+              <a:lnSpc>
+                <a:spcPct val="104000"/>
+              </a:lnSpc>
+              <a:spcBef>
+                <a:spcPts val="0"/>
+              </a:spcBef>
+            </a:pPr>
+            <a:r>
+              <a:rPr lang="pt-BR" sz="2350" b="1" kern="0" spc="-72" dirty="0">
+                <a:solidFill>
+                  <a:srgbClr val="000000"/>
+                </a:solidFill>
+                <a:latin typeface="Inter Bold" pitchFamily="34" charset="0"/>
+                <a:ea typeface="Inter Bold" pitchFamily="34" charset="-122"/>
+              </a:rPr>
               <a:t>Maneiras de declarar Classes</a:t>
             </a:r>
           </a:p>
@@ -21273,12 +21389,26 @@
         </p:spPr>
         <p:txBody>
           <a:bodyPr>
-            <a:normAutofit fontScale="90000"/>
+            <a:normAutofit/>
           </a:bodyPr>
           <a:lstStyle/>
           <a:p>
-            <a:r>
-              <a:rPr lang="pt-BR" dirty="0"/>
+            <a:pPr>
+              <a:lnSpc>
+                <a:spcPct val="104000"/>
+              </a:lnSpc>
+              <a:spcBef>
+                <a:spcPts val="0"/>
+              </a:spcBef>
+            </a:pPr>
+            <a:r>
+              <a:rPr lang="pt-BR" sz="2400" b="1" kern="0" spc="-72" dirty="0">
+                <a:solidFill>
+                  <a:srgbClr val="000000"/>
+                </a:solidFill>
+                <a:latin typeface="Inter Bold" pitchFamily="34" charset="0"/>
+                <a:ea typeface="Inter Bold" pitchFamily="34" charset="-122"/>
+              </a:rPr>
               <a:t>Maneiras de declarar Classes</a:t>
             </a:r>
           </a:p>

--- a/Software Básico/Aula 02 - Algoritmos/Aula 02 - Variaveis.pptx
+++ b/Software Básico/Aula 02 - Algoritmos/Aula 02 - Variaveis.pptx
@@ -29,31 +29,19 @@
   <p:notesSz cx="6858000" cy="12192000"/>
   <p:embeddedFontLst>
     <p:embeddedFont>
-      <p:font typeface="Calibri" panose="020F0502020204030204" pitchFamily="34" charset="0"/>
+      <p:font typeface="Consolas" panose="020B0609020204030204" pitchFamily="49" charset="0"/>
       <p:regular r:id="rId19"/>
       <p:bold r:id="rId20"/>
       <p:italic r:id="rId21"/>
       <p:boldItalic r:id="rId22"/>
     </p:embeddedFont>
     <p:embeddedFont>
-      <p:font typeface="Consolas" panose="020B0609020204030204" pitchFamily="49" charset="0"/>
+      <p:font typeface="Inter" panose="020B0604020202020204" charset="0"/>
       <p:regular r:id="rId23"/>
-      <p:bold r:id="rId24"/>
-      <p:italic r:id="rId25"/>
-      <p:boldItalic r:id="rId26"/>
-    </p:embeddedFont>
-    <p:embeddedFont>
-      <p:font typeface="Inter" panose="020B0604020202020204" charset="0"/>
-      <p:regular r:id="rId27"/>
     </p:embeddedFont>
     <p:embeddedFont>
       <p:font typeface="Inter Bold" panose="020B0604020202020204" charset="0"/>
-      <p:regular r:id="rId28"/>
-    </p:embeddedFont>
-    <p:embeddedFont>
-      <p:font typeface="Tahoma" panose="020B0604030504040204" pitchFamily="34" charset="0"/>
-      <p:regular r:id="rId29"/>
-      <p:bold r:id="rId30"/>
+      <p:regular r:id="rId24"/>
     </p:embeddedFont>
   </p:embeddedFontLst>
   <p:defaultTextStyle>
@@ -11834,24 +11822,34 @@
           <a:bodyPr wrap="none" lIns="0" tIns="0" rIns="0" bIns="0" rtlCol="0" anchor="t"/>
           <a:lstStyle/>
           <a:p>
-            <a:pPr marL="0" indent="0" algn="l">
+            <a:pPr marL="0" indent="0">
               <a:lnSpc>
                 <a:spcPct val="104000"/>
               </a:lnSpc>
+              <a:buFont typeface="Arial"/>
               <a:buNone/>
             </a:pPr>
             <a:r>
-              <a:rPr lang="en-US" sz="3700" b="1" kern="0" spc="-112" dirty="0">
-                <a:solidFill>
-                  <a:srgbClr val="000000"/>
-                </a:solidFill>
+              <a:rPr lang="en-US" sz="2350" b="1" spc="-72" dirty="0">
                 <a:latin typeface="Inter Bold" pitchFamily="34" charset="0"/>
                 <a:ea typeface="Inter Bold" pitchFamily="34" charset="-122"/>
-                <a:cs typeface="Inter Bold" pitchFamily="34" charset="-120"/>
-              </a:rPr>
-              <a:t>Introdução ao Fluxograma</a:t>
-            </a:r>
-            <a:endParaRPr lang="en-US" sz="3700" dirty="0"/>
+              </a:rPr>
+              <a:t>Introdução </a:t>
+            </a:r>
+            <a:r>
+              <a:rPr lang="en-US" sz="2350" b="1" spc="-72" dirty="0" err="1">
+                <a:latin typeface="Inter Bold" pitchFamily="34" charset="0"/>
+                <a:ea typeface="Inter Bold" pitchFamily="34" charset="-122"/>
+              </a:rPr>
+              <a:t>ao</a:t>
+            </a:r>
+            <a:r>
+              <a:rPr lang="en-US" sz="2350" b="1" spc="-72" dirty="0">
+                <a:latin typeface="Inter Bold" pitchFamily="34" charset="0"/>
+                <a:ea typeface="Inter Bold" pitchFamily="34" charset="-122"/>
+              </a:rPr>
+              <a:t> Fluxograma</a:t>
+            </a:r>
           </a:p>
         </p:txBody>
       </p:sp>
@@ -12900,24 +12898,34 @@
           <a:bodyPr wrap="none" lIns="0" tIns="0" rIns="0" bIns="0" rtlCol="0" anchor="t"/>
           <a:lstStyle/>
           <a:p>
-            <a:pPr marL="0" indent="0" algn="l">
+            <a:pPr marL="0" indent="0">
               <a:lnSpc>
                 <a:spcPct val="104000"/>
               </a:lnSpc>
+              <a:buFont typeface="Arial"/>
               <a:buNone/>
             </a:pPr>
             <a:r>
-              <a:rPr lang="en-US" sz="3700" b="1" kern="0" spc="-112" dirty="0">
-                <a:solidFill>
-                  <a:srgbClr val="000000"/>
-                </a:solidFill>
+              <a:rPr lang="en-US" sz="2350" b="1" spc="-72" dirty="0">
                 <a:latin typeface="Inter Bold" pitchFamily="34" charset="0"/>
                 <a:ea typeface="Inter Bold" pitchFamily="34" charset="-122"/>
-                <a:cs typeface="Inter Bold" pitchFamily="34" charset="-120"/>
-              </a:rPr>
-              <a:t>Introdução ao Fluxograma</a:t>
-            </a:r>
-            <a:endParaRPr lang="en-US" sz="3700" dirty="0"/>
+              </a:rPr>
+              <a:t>Introdução </a:t>
+            </a:r>
+            <a:r>
+              <a:rPr lang="en-US" sz="2350" b="1" spc="-72" dirty="0" err="1">
+                <a:latin typeface="Inter Bold" pitchFamily="34" charset="0"/>
+                <a:ea typeface="Inter Bold" pitchFamily="34" charset="-122"/>
+              </a:rPr>
+              <a:t>ao</a:t>
+            </a:r>
+            <a:r>
+              <a:rPr lang="en-US" sz="2350" b="1" spc="-72" dirty="0">
+                <a:latin typeface="Inter Bold" pitchFamily="34" charset="0"/>
+                <a:ea typeface="Inter Bold" pitchFamily="34" charset="-122"/>
+              </a:rPr>
+              <a:t> Fluxograma</a:t>
+            </a:r>
           </a:p>
         </p:txBody>
       </p:sp>
@@ -14008,35 +14016,27 @@
           <a:bodyPr wrap="none" lIns="0" tIns="0" rIns="0" bIns="0" rtlCol="0" anchor="t"/>
           <a:lstStyle/>
           <a:p>
-            <a:pPr marL="0" indent="0" algn="l">
+            <a:pPr marL="0" indent="0">
               <a:lnSpc>
                 <a:spcPct val="104000"/>
               </a:lnSpc>
+              <a:buFont typeface="Arial"/>
               <a:buNone/>
             </a:pPr>
             <a:r>
-              <a:rPr lang="en-US" sz="3700" b="1" kern="0" spc="-112" dirty="0" err="1">
-                <a:solidFill>
-                  <a:srgbClr val="000000"/>
-                </a:solidFill>
+              <a:rPr lang="en-US" sz="2350" b="1" spc="-72" dirty="0" err="1">
                 <a:latin typeface="Inter Bold" pitchFamily="34" charset="0"/>
                 <a:ea typeface="Inter Bold" pitchFamily="34" charset="-122"/>
-                <a:cs typeface="Inter Bold" pitchFamily="34" charset="-120"/>
               </a:rPr>
               <a:t>Exemplos</a:t>
             </a:r>
             <a:r>
-              <a:rPr lang="en-US" sz="3700" b="1" kern="0" spc="-112" dirty="0">
-                <a:solidFill>
-                  <a:srgbClr val="000000"/>
-                </a:solidFill>
+              <a:rPr lang="en-US" sz="2350" b="1" spc="-72" dirty="0">
                 <a:latin typeface="Inter Bold" pitchFamily="34" charset="0"/>
                 <a:ea typeface="Inter Bold" pitchFamily="34" charset="-122"/>
-                <a:cs typeface="Inter Bold" pitchFamily="34" charset="-120"/>
               </a:rPr>
               <a:t> de Fluxograma</a:t>
             </a:r>
-            <a:endParaRPr lang="en-US" sz="3700" dirty="0"/>
           </a:p>
         </p:txBody>
       </p:sp>
@@ -14937,7 +14937,7 @@
               </a:spcBef>
             </a:pPr>
             <a:r>
-              <a:rPr lang="pt-BR" sz="3600" b="1" spc="-72" dirty="0">
+              <a:rPr lang="pt-BR" sz="2350" b="1" spc="-72" dirty="0">
                 <a:solidFill>
                   <a:srgbClr val="000000"/>
                 </a:solidFill>
@@ -15393,7 +15393,7 @@
               </a:spcBef>
             </a:pPr>
             <a:r>
-              <a:rPr lang="pt-BR" sz="3600" b="1" spc="-72" dirty="0">
+              <a:rPr lang="pt-BR" sz="2350" b="1" spc="-72" dirty="0">
                 <a:solidFill>
                   <a:srgbClr val="000000"/>
                 </a:solidFill>
@@ -15794,7 +15794,7 @@
               </a:spcBef>
             </a:pPr>
             <a:r>
-              <a:rPr lang="pt-BR" sz="3600" b="1" spc="-72" dirty="0">
+              <a:rPr lang="pt-BR" sz="2350" b="1" spc="-72" dirty="0">
                 <a:solidFill>
                   <a:srgbClr val="000000"/>
                 </a:solidFill>
@@ -18091,179 +18091,134 @@
           </a:p>
         </p:txBody>
       </p:sp>
-      <p:grpSp>
-        <p:nvGrpSpPr>
-          <p:cNvPr id="32" name="Agrupar 31">
-            <a:extLst>
-              <a:ext uri="{FF2B5EF4-FFF2-40B4-BE49-F238E27FC236}">
-                <a16:creationId xmlns:a16="http://schemas.microsoft.com/office/drawing/2014/main" id="{526BD7DA-151D-7669-3DE6-57D16FD5A83F}"/>
-              </a:ext>
-            </a:extLst>
-          </p:cNvPr>
-          <p:cNvGrpSpPr/>
+      <p:sp>
+        <p:nvSpPr>
+          <p:cNvPr id="4" name="Text 1"/>
+          <p:cNvSpPr/>
           <p:nvPr/>
-        </p:nvGrpSpPr>
-        <p:grpSpPr>
+        </p:nvSpPr>
+        <p:spPr>
           <a:xfrm>
-            <a:off x="2914875" y="1653381"/>
-            <a:ext cx="6383575" cy="3788767"/>
-            <a:chOff x="2904060" y="1077119"/>
-            <a:chExt cx="6383575" cy="3788767"/>
+            <a:off x="7357939" y="4037500"/>
+            <a:ext cx="1586812" cy="305686"/>
           </a:xfrm>
-        </p:grpSpPr>
-        <p:pic>
-          <p:nvPicPr>
-            <p:cNvPr id="3" name="Image 0" descr="preencoded.png"/>
-            <p:cNvPicPr>
-              <a:picLocks noChangeAspect="1"/>
-            </p:cNvPicPr>
-            <p:nvPr/>
-          </p:nvPicPr>
-          <p:blipFill>
-            <a:blip r:embed="rId3"/>
-            <a:stretch>
-              <a:fillRect/>
-            </a:stretch>
-          </p:blipFill>
-          <p:spPr>
-            <a:xfrm>
-              <a:off x="2904060" y="1077119"/>
-              <a:ext cx="6383575" cy="3788767"/>
-            </a:xfrm>
-            <a:prstGeom prst="rect">
-              <a:avLst/>
-            </a:prstGeom>
-          </p:spPr>
-        </p:pic>
-        <p:sp>
-          <p:nvSpPr>
-            <p:cNvPr id="4" name="Text 1"/>
-            <p:cNvSpPr/>
-            <p:nvPr/>
-          </p:nvSpPr>
-          <p:spPr>
-            <a:xfrm>
-              <a:off x="7347124" y="3461238"/>
-              <a:ext cx="1586812" cy="305686"/>
-            </a:xfrm>
-            <a:prstGeom prst="rect">
-              <a:avLst/>
-            </a:prstGeom>
-            <a:noFill/>
-            <a:ln/>
-          </p:spPr>
-          <p:txBody>
-            <a:bodyPr wrap="none" lIns="0" tIns="0" rIns="0" bIns="0" rtlCol="0" anchor="t"/>
-            <a:lstStyle/>
-            <a:p>
-              <a:pPr marL="0" indent="0" algn="ctr">
-                <a:lnSpc>
-                  <a:spcPct val="104000"/>
-                </a:lnSpc>
-                <a:buNone/>
-              </a:pPr>
-              <a:r>
-                <a:rPr lang="en-US" sz="1900" b="1" kern="0" spc="-58" dirty="0">
-                  <a:solidFill>
-                    <a:srgbClr val="272525"/>
-                  </a:solidFill>
-                  <a:latin typeface="Inter Bold" pitchFamily="34" charset="0"/>
-                  <a:ea typeface="Inter Bold" pitchFamily="34" charset="-122"/>
-                  <a:cs typeface="Inter Bold" pitchFamily="34" charset="-120"/>
-                </a:rPr>
-                <a:t>Saída</a:t>
-              </a:r>
-              <a:endParaRPr lang="en-US" sz="1900" dirty="0"/>
-            </a:p>
-          </p:txBody>
-        </p:sp>
-        <p:sp>
-          <p:nvSpPr>
-            <p:cNvPr id="5" name="Text 2"/>
-            <p:cNvSpPr/>
-            <p:nvPr/>
-          </p:nvSpPr>
-          <p:spPr>
-            <a:xfrm>
-              <a:off x="5301223" y="3461238"/>
-              <a:ext cx="1831535" cy="611372"/>
-            </a:xfrm>
-            <a:prstGeom prst="rect">
-              <a:avLst/>
-            </a:prstGeom>
-            <a:noFill/>
-            <a:ln/>
-          </p:spPr>
-          <p:txBody>
-            <a:bodyPr wrap="square" lIns="0" tIns="0" rIns="0" bIns="0" rtlCol="0" anchor="t">
-              <a:normAutofit/>
-            </a:bodyPr>
-            <a:lstStyle/>
-            <a:p>
-              <a:pPr marL="0" indent="0" algn="ctr">
-                <a:lnSpc>
-                  <a:spcPct val="104000"/>
-                </a:lnSpc>
-                <a:buNone/>
-              </a:pPr>
-              <a:r>
-                <a:rPr lang="en-US" sz="1900" b="1" kern="0" spc="-58" dirty="0">
-                  <a:solidFill>
-                    <a:srgbClr val="272525"/>
-                  </a:solidFill>
-                  <a:latin typeface="Inter Bold" pitchFamily="34" charset="0"/>
-                  <a:ea typeface="Inter Bold" pitchFamily="34" charset="-122"/>
-                  <a:cs typeface="Inter Bold" pitchFamily="34" charset="-120"/>
-                </a:rPr>
-                <a:t>Processamento</a:t>
-              </a:r>
-              <a:endParaRPr lang="en-US" sz="1900" dirty="0"/>
-            </a:p>
-          </p:txBody>
-        </p:sp>
-        <p:sp>
-          <p:nvSpPr>
-            <p:cNvPr id="6" name="Text 3"/>
-            <p:cNvSpPr/>
-            <p:nvPr/>
-          </p:nvSpPr>
-          <p:spPr>
-            <a:xfrm>
-              <a:off x="3250715" y="3429000"/>
-              <a:ext cx="1586812" cy="305686"/>
-            </a:xfrm>
-            <a:prstGeom prst="rect">
-              <a:avLst/>
-            </a:prstGeom>
-            <a:noFill/>
-            <a:ln/>
-          </p:spPr>
-          <p:txBody>
-            <a:bodyPr wrap="none" lIns="0" tIns="0" rIns="0" bIns="0" rtlCol="0" anchor="t"/>
-            <a:lstStyle/>
-            <a:p>
-              <a:pPr marL="0" indent="0" algn="ctr">
-                <a:lnSpc>
-                  <a:spcPct val="104000"/>
-                </a:lnSpc>
-                <a:buNone/>
-              </a:pPr>
-              <a:r>
-                <a:rPr lang="en-US" sz="1900" b="1" kern="0" spc="-58" dirty="0">
-                  <a:solidFill>
-                    <a:srgbClr val="272525"/>
-                  </a:solidFill>
-                  <a:latin typeface="Inter Bold" pitchFamily="34" charset="0"/>
-                  <a:ea typeface="Inter Bold" pitchFamily="34" charset="-122"/>
-                  <a:cs typeface="Inter Bold" pitchFamily="34" charset="-120"/>
-                </a:rPr>
-                <a:t>Entrada</a:t>
-              </a:r>
-              <a:endParaRPr lang="en-US" sz="1900" dirty="0"/>
-            </a:p>
-          </p:txBody>
-        </p:sp>
-      </p:grpSp>
+          <a:prstGeom prst="rect">
+            <a:avLst/>
+          </a:prstGeom>
+          <a:noFill/>
+          <a:ln/>
+        </p:spPr>
+        <p:txBody>
+          <a:bodyPr wrap="none" lIns="0" tIns="0" rIns="0" bIns="0" rtlCol="0" anchor="t"/>
+          <a:lstStyle/>
+          <a:p>
+            <a:pPr marL="0" indent="0" algn="ctr">
+              <a:lnSpc>
+                <a:spcPct val="104000"/>
+              </a:lnSpc>
+              <a:buNone/>
+            </a:pPr>
+            <a:r>
+              <a:rPr lang="en-US" sz="1900" b="1" kern="0" spc="-58" dirty="0">
+                <a:solidFill>
+                  <a:srgbClr val="272525"/>
+                </a:solidFill>
+                <a:latin typeface="Inter Bold" pitchFamily="34" charset="0"/>
+                <a:ea typeface="Inter Bold" pitchFamily="34" charset="-122"/>
+                <a:cs typeface="Inter Bold" pitchFamily="34" charset="-120"/>
+              </a:rPr>
+              <a:t>Saída</a:t>
+            </a:r>
+            <a:endParaRPr lang="en-US" sz="1900" dirty="0"/>
+          </a:p>
+        </p:txBody>
+      </p:sp>
+      <p:sp>
+        <p:nvSpPr>
+          <p:cNvPr id="5" name="Text 2"/>
+          <p:cNvSpPr/>
+          <p:nvPr/>
+        </p:nvSpPr>
+        <p:spPr>
+          <a:xfrm>
+            <a:off x="5312038" y="4037500"/>
+            <a:ext cx="1831535" cy="611372"/>
+          </a:xfrm>
+          <a:prstGeom prst="rect">
+            <a:avLst/>
+          </a:prstGeom>
+          <a:noFill/>
+          <a:ln/>
+        </p:spPr>
+        <p:txBody>
+          <a:bodyPr wrap="square" lIns="0" tIns="0" rIns="0" bIns="0" rtlCol="0" anchor="t">
+            <a:normAutofit/>
+          </a:bodyPr>
+          <a:lstStyle/>
+          <a:p>
+            <a:pPr marL="0" indent="0" algn="ctr">
+              <a:lnSpc>
+                <a:spcPct val="104000"/>
+              </a:lnSpc>
+              <a:buNone/>
+            </a:pPr>
+            <a:r>
+              <a:rPr lang="en-US" sz="1900" b="1" kern="0" spc="-58" dirty="0">
+                <a:solidFill>
+                  <a:srgbClr val="272525"/>
+                </a:solidFill>
+                <a:latin typeface="Inter Bold" pitchFamily="34" charset="0"/>
+                <a:ea typeface="Inter Bold" pitchFamily="34" charset="-122"/>
+                <a:cs typeface="Inter Bold" pitchFamily="34" charset="-120"/>
+              </a:rPr>
+              <a:t>Processamento</a:t>
+            </a:r>
+            <a:endParaRPr lang="en-US" sz="1900" dirty="0"/>
+          </a:p>
+        </p:txBody>
+      </p:sp>
+      <p:sp>
+        <p:nvSpPr>
+          <p:cNvPr id="6" name="Text 3"/>
+          <p:cNvSpPr/>
+          <p:nvPr/>
+        </p:nvSpPr>
+        <p:spPr>
+          <a:xfrm>
+            <a:off x="3261530" y="4005262"/>
+            <a:ext cx="1586812" cy="305686"/>
+          </a:xfrm>
+          <a:prstGeom prst="rect">
+            <a:avLst/>
+          </a:prstGeom>
+          <a:noFill/>
+          <a:ln/>
+        </p:spPr>
+        <p:txBody>
+          <a:bodyPr wrap="none" lIns="0" tIns="0" rIns="0" bIns="0" rtlCol="0" anchor="t"/>
+          <a:lstStyle/>
+          <a:p>
+            <a:pPr marL="0" indent="0" algn="ctr">
+              <a:lnSpc>
+                <a:spcPct val="104000"/>
+              </a:lnSpc>
+              <a:buNone/>
+            </a:pPr>
+            <a:r>
+              <a:rPr lang="en-US" sz="1900" b="1" kern="0" spc="-58" dirty="0">
+                <a:solidFill>
+                  <a:srgbClr val="272525"/>
+                </a:solidFill>
+                <a:latin typeface="Inter Bold" pitchFamily="34" charset="0"/>
+                <a:ea typeface="Inter Bold" pitchFamily="34" charset="-122"/>
+                <a:cs typeface="Inter Bold" pitchFamily="34" charset="-120"/>
+              </a:rPr>
+              <a:t>Entrada</a:t>
+            </a:r>
+            <a:endParaRPr lang="en-US" sz="1900" dirty="0"/>
+          </a:p>
+        </p:txBody>
+      </p:sp>
       <p:grpSp>
         <p:nvGrpSpPr>
           <p:cNvPr id="33" name="Agrupar 32">
@@ -19275,6 +19230,36 @@
           </p:txBody>
         </p:sp>
       </p:grpSp>
+      <p:pic>
+        <p:nvPicPr>
+          <p:cNvPr id="35" name="Imagem 34">
+            <a:extLst>
+              <a:ext uri="{FF2B5EF4-FFF2-40B4-BE49-F238E27FC236}">
+                <a16:creationId xmlns:a16="http://schemas.microsoft.com/office/drawing/2014/main" id="{B02992DF-6BF0-941E-6AEB-A955747BD1A9}"/>
+              </a:ext>
+            </a:extLst>
+          </p:cNvPr>
+          <p:cNvPicPr>
+            <a:picLocks noChangeAspect="1"/>
+          </p:cNvPicPr>
+          <p:nvPr/>
+        </p:nvPicPr>
+        <p:blipFill>
+          <a:blip r:embed="rId3"/>
+          <a:stretch>
+            <a:fillRect/>
+          </a:stretch>
+        </p:blipFill>
+        <p:spPr>
+          <a:xfrm>
+            <a:off x="3081876" y="1730745"/>
+            <a:ext cx="6027942" cy="2179509"/>
+          </a:xfrm>
+          <a:prstGeom prst="rect">
+            <a:avLst/>
+          </a:prstGeom>
+        </p:spPr>
+      </p:pic>
     </p:spTree>
   </p:cSld>
   <p:clrMapOvr>
@@ -20498,29 +20483,72 @@
               </a:rPr>
               <a:t>valor</a:t>
             </a:r>
+            <a:endParaRPr lang="pt-BR" sz="2000" dirty="0">
+              <a:latin typeface="Times New Roman" panose="02020603050405020304" pitchFamily="18" charset="0"/>
+              <a:ea typeface="Tahoma" panose="020B0604030504040204" pitchFamily="34" charset="0"/>
+              <a:cs typeface="Times New Roman" panose="02020603050405020304" pitchFamily="18" charset="0"/>
+            </a:endParaRPr>
+          </a:p>
+          <a:p>
+            <a:pPr>
+              <a:lnSpc>
+                <a:spcPct val="150000"/>
+              </a:lnSpc>
+            </a:pPr>
             <a:r>
               <a:rPr lang="pt-BR" sz="2000" dirty="0">
                 <a:latin typeface="Times New Roman" panose="02020603050405020304" pitchFamily="18" charset="0"/>
                 <a:ea typeface="Tahoma" panose="020B0604030504040204" pitchFamily="34" charset="0"/>
                 <a:cs typeface="Times New Roman" panose="02020603050405020304" pitchFamily="18" charset="0"/>
               </a:rPr>
-              <a:t>;</a:t>
+              <a:t>Exemplo:</a:t>
             </a:r>
           </a:p>
           <a:p>
-            <a:pPr>
+            <a:pPr marL="800100" lvl="1" indent="-342900">
               <a:lnSpc>
                 <a:spcPct val="150000"/>
               </a:lnSpc>
+              <a:buFont typeface="Arial" panose="020B0604020202020204" pitchFamily="34" charset="0"/>
+              <a:buChar char="•"/>
             </a:pPr>
+            <a:r>
+              <a:rPr lang="pt-BR" sz="2000" dirty="0">
+                <a:solidFill>
+                  <a:schemeClr val="accent2">
+                    <a:lumMod val="75000"/>
+                  </a:schemeClr>
+                </a:solidFill>
+                <a:latin typeface="Times New Roman" panose="02020603050405020304" pitchFamily="18" charset="0"/>
+                <a:ea typeface="Tahoma" panose="020B0604030504040204" pitchFamily="34" charset="0"/>
+                <a:cs typeface="Times New Roman" panose="02020603050405020304" pitchFamily="18" charset="0"/>
+              </a:rPr>
+              <a:t>idade</a:t>
+            </a:r>
             <a:r>
               <a:rPr lang="pt-BR" sz="2000" dirty="0">
                 <a:latin typeface="Times New Roman" panose="02020603050405020304" pitchFamily="18" charset="0"/>
                 <a:ea typeface="Tahoma" panose="020B0604030504040204" pitchFamily="34" charset="0"/>
                 <a:cs typeface="Times New Roman" panose="02020603050405020304" pitchFamily="18" charset="0"/>
               </a:rPr>
-              <a:t>Exemplo:</a:t>
-            </a:r>
+              <a:t> = </a:t>
+            </a:r>
+            <a:r>
+              <a:rPr lang="pt-BR" sz="2000" dirty="0">
+                <a:solidFill>
+                  <a:srgbClr val="FF0000"/>
+                </a:solidFill>
+                <a:latin typeface="Times New Roman" panose="02020603050405020304" pitchFamily="18" charset="0"/>
+                <a:ea typeface="Tahoma" panose="020B0604030504040204" pitchFamily="34" charset="0"/>
+                <a:cs typeface="Times New Roman" panose="02020603050405020304" pitchFamily="18" charset="0"/>
+              </a:rPr>
+              <a:t>50</a:t>
+            </a:r>
+            <a:endParaRPr lang="pt-BR" sz="2000" dirty="0">
+              <a:latin typeface="Times New Roman" panose="02020603050405020304" pitchFamily="18" charset="0"/>
+              <a:ea typeface="Tahoma" panose="020B0604030504040204" pitchFamily="34" charset="0"/>
+              <a:cs typeface="Times New Roman" panose="02020603050405020304" pitchFamily="18" charset="0"/>
+            </a:endParaRPr>
           </a:p>
           <a:p>
             <a:pPr marL="800100" lvl="1" indent="-342900">
@@ -20533,15 +20561,15 @@
             <a:r>
               <a:rPr lang="pt-BR" sz="2000" dirty="0">
                 <a:solidFill>
-                  <a:schemeClr val="accent1">
-                    <a:lumMod val="50000"/>
+                  <a:schemeClr val="accent2">
+                    <a:lumMod val="75000"/>
                   </a:schemeClr>
                 </a:solidFill>
                 <a:latin typeface="Times New Roman" panose="02020603050405020304" pitchFamily="18" charset="0"/>
                 <a:ea typeface="Tahoma" panose="020B0604030504040204" pitchFamily="34" charset="0"/>
                 <a:cs typeface="Times New Roman" panose="02020603050405020304" pitchFamily="18" charset="0"/>
               </a:rPr>
-              <a:t>int</a:t>
+              <a:t>peso</a:t>
             </a:r>
             <a:r>
               <a:rPr lang="pt-BR" sz="2000" dirty="0">
@@ -20549,10 +20577,35 @@
                 <a:ea typeface="Tahoma" panose="020B0604030504040204" pitchFamily="34" charset="0"/>
                 <a:cs typeface="Times New Roman" panose="02020603050405020304" pitchFamily="18" charset="0"/>
               </a:rPr>
-              <a:t> </a:t>
+              <a:t> = </a:t>
             </a:r>
             <a:r>
               <a:rPr lang="pt-BR" sz="2000" dirty="0">
+                <a:solidFill>
+                  <a:srgbClr val="FF0000"/>
+                </a:solidFill>
+                <a:latin typeface="Times New Roman" panose="02020603050405020304" pitchFamily="18" charset="0"/>
+                <a:ea typeface="Tahoma" panose="020B0604030504040204" pitchFamily="34" charset="0"/>
+                <a:cs typeface="Times New Roman" panose="02020603050405020304" pitchFamily="18" charset="0"/>
+              </a:rPr>
+              <a:t>80.5</a:t>
+            </a:r>
+            <a:endParaRPr lang="pt-BR" sz="2000" dirty="0">
+              <a:latin typeface="Times New Roman" panose="02020603050405020304" pitchFamily="18" charset="0"/>
+              <a:ea typeface="Tahoma" panose="020B0604030504040204" pitchFamily="34" charset="0"/>
+              <a:cs typeface="Times New Roman" panose="02020603050405020304" pitchFamily="18" charset="0"/>
+            </a:endParaRPr>
+          </a:p>
+          <a:p>
+            <a:pPr marL="800100" lvl="1" indent="-342900">
+              <a:lnSpc>
+                <a:spcPct val="150000"/>
+              </a:lnSpc>
+              <a:buFont typeface="Arial" panose="020B0604020202020204" pitchFamily="34" charset="0"/>
+              <a:buChar char="•"/>
+            </a:pPr>
+            <a:r>
+              <a:rPr lang="pt-BR" sz="2000" dirty="0" err="1">
                 <a:solidFill>
                   <a:schemeClr val="accent2">
                     <a:lumMod val="75000"/>
@@ -20562,7 +20615,7 @@
                 <a:ea typeface="Tahoma" panose="020B0604030504040204" pitchFamily="34" charset="0"/>
                 <a:cs typeface="Times New Roman" panose="02020603050405020304" pitchFamily="18" charset="0"/>
               </a:rPr>
-              <a:t>idade</a:t>
+              <a:t>genero</a:t>
             </a:r>
             <a:r>
               <a:rPr lang="pt-BR" sz="2000" dirty="0">
@@ -20581,114 +20634,13 @@
                 <a:ea typeface="Tahoma" panose="020B0604030504040204" pitchFamily="34" charset="0"/>
                 <a:cs typeface="Times New Roman" panose="02020603050405020304" pitchFamily="18" charset="0"/>
               </a:rPr>
-              <a:t>50</a:t>
-            </a:r>
-            <a:r>
-              <a:rPr lang="pt-BR" sz="2000" dirty="0">
-                <a:latin typeface="Times New Roman" panose="02020603050405020304" pitchFamily="18" charset="0"/>
-                <a:ea typeface="Tahoma" panose="020B0604030504040204" pitchFamily="34" charset="0"/>
-                <a:cs typeface="Times New Roman" panose="02020603050405020304" pitchFamily="18" charset="0"/>
-              </a:rPr>
-              <a:t>;</a:t>
-            </a:r>
-          </a:p>
-          <a:p>
-            <a:pPr marL="800100" lvl="1" indent="-342900">
-              <a:lnSpc>
-                <a:spcPct val="150000"/>
-              </a:lnSpc>
-              <a:buFont typeface="Arial" panose="020B0604020202020204" pitchFamily="34" charset="0"/>
-              <a:buChar char="•"/>
-            </a:pPr>
-            <a:r>
-              <a:rPr lang="pt-BR" sz="2000" dirty="0">
-                <a:solidFill>
-                  <a:schemeClr val="accent2">
-                    <a:lumMod val="75000"/>
-                  </a:schemeClr>
-                </a:solidFill>
-                <a:latin typeface="Times New Roman" panose="02020603050405020304" pitchFamily="18" charset="0"/>
-                <a:ea typeface="Tahoma" panose="020B0604030504040204" pitchFamily="34" charset="0"/>
-                <a:cs typeface="Times New Roman" panose="02020603050405020304" pitchFamily="18" charset="0"/>
-              </a:rPr>
-              <a:t>peso</a:t>
-            </a:r>
-            <a:r>
-              <a:rPr lang="pt-BR" sz="2000" dirty="0">
-                <a:latin typeface="Times New Roman" panose="02020603050405020304" pitchFamily="18" charset="0"/>
-                <a:ea typeface="Tahoma" panose="020B0604030504040204" pitchFamily="34" charset="0"/>
-                <a:cs typeface="Times New Roman" panose="02020603050405020304" pitchFamily="18" charset="0"/>
-              </a:rPr>
-              <a:t> = </a:t>
-            </a:r>
-            <a:r>
-              <a:rPr lang="pt-BR" sz="2000" dirty="0">
-                <a:solidFill>
-                  <a:srgbClr val="FF0000"/>
-                </a:solidFill>
-                <a:latin typeface="Times New Roman" panose="02020603050405020304" pitchFamily="18" charset="0"/>
-                <a:ea typeface="Tahoma" panose="020B0604030504040204" pitchFamily="34" charset="0"/>
-                <a:cs typeface="Times New Roman" panose="02020603050405020304" pitchFamily="18" charset="0"/>
-              </a:rPr>
-              <a:t>80.5</a:t>
-            </a:r>
-            <a:r>
-              <a:rPr lang="pt-BR" sz="2000" dirty="0">
-                <a:latin typeface="Times New Roman" panose="02020603050405020304" pitchFamily="18" charset="0"/>
-                <a:ea typeface="Tahoma" panose="020B0604030504040204" pitchFamily="34" charset="0"/>
-                <a:cs typeface="Times New Roman" panose="02020603050405020304" pitchFamily="18" charset="0"/>
-              </a:rPr>
-              <a:t>;</a:t>
-            </a:r>
-          </a:p>
-          <a:p>
-            <a:pPr marL="800100" lvl="1" indent="-342900">
-              <a:lnSpc>
-                <a:spcPct val="150000"/>
-              </a:lnSpc>
-              <a:buFont typeface="Arial" panose="020B0604020202020204" pitchFamily="34" charset="0"/>
-              <a:buChar char="•"/>
-            </a:pPr>
-            <a:r>
-              <a:rPr lang="pt-BR" sz="2000" dirty="0" err="1">
-                <a:solidFill>
-                  <a:schemeClr val="accent2">
-                    <a:lumMod val="75000"/>
-                  </a:schemeClr>
-                </a:solidFill>
-                <a:latin typeface="Times New Roman" panose="02020603050405020304" pitchFamily="18" charset="0"/>
-                <a:ea typeface="Tahoma" panose="020B0604030504040204" pitchFamily="34" charset="0"/>
-                <a:cs typeface="Times New Roman" panose="02020603050405020304" pitchFamily="18" charset="0"/>
-              </a:rPr>
-              <a:t>genero</a:t>
-            </a:r>
-            <a:r>
-              <a:rPr lang="pt-BR" sz="2000" dirty="0">
-                <a:latin typeface="Times New Roman" panose="02020603050405020304" pitchFamily="18" charset="0"/>
-                <a:ea typeface="Tahoma" panose="020B0604030504040204" pitchFamily="34" charset="0"/>
-                <a:cs typeface="Times New Roman" panose="02020603050405020304" pitchFamily="18" charset="0"/>
-              </a:rPr>
-              <a:t> = </a:t>
-            </a:r>
-            <a:r>
-              <a:rPr lang="pt-BR" sz="2000" dirty="0">
-                <a:solidFill>
-                  <a:srgbClr val="FF0000"/>
-                </a:solidFill>
-                <a:latin typeface="Times New Roman" panose="02020603050405020304" pitchFamily="18" charset="0"/>
-                <a:ea typeface="Tahoma" panose="020B0604030504040204" pitchFamily="34" charset="0"/>
-                <a:cs typeface="Times New Roman" panose="02020603050405020304" pitchFamily="18" charset="0"/>
-              </a:rPr>
               <a:t>“F”</a:t>
             </a:r>
-            <a:r>
-              <a:rPr lang="pt-BR" sz="2000" dirty="0">
-                <a:latin typeface="Times New Roman" panose="02020603050405020304" pitchFamily="18" charset="0"/>
-                <a:ea typeface="Tahoma" panose="020B0604030504040204" pitchFamily="34" charset="0"/>
-                <a:cs typeface="Times New Roman" panose="02020603050405020304" pitchFamily="18" charset="0"/>
-              </a:rPr>
-              <a:t>;</a:t>
-            </a:r>
+            <a:endParaRPr lang="pt-BR" sz="2000" dirty="0">
+              <a:latin typeface="Times New Roman" panose="02020603050405020304" pitchFamily="18" charset="0"/>
+              <a:ea typeface="Tahoma" panose="020B0604030504040204" pitchFamily="34" charset="0"/>
+              <a:cs typeface="Times New Roman" panose="02020603050405020304" pitchFamily="18" charset="0"/>
+            </a:endParaRPr>
           </a:p>
           <a:p>
             <a:pPr>
